--- a/slides/06_Fixing_Our_Data.pptx
+++ b/slides/06_Fixing_Our_Data.pptx
@@ -131,7 +131,7 @@
   <p:extLst>
     <p:ext uri="{521415D9-36F7-43E2-AB2F-B90AF26B5E84}">
       <p14:sectionLst xmlns:p14="http://schemas.microsoft.com/office/powerpoint/2010/main">
-        <p14:section name="Introduction" id="{a3a7e333-d6af-595e-1b96-6439afbcc592}">
+        <p14:section name="Introduction" id="{ef728a5d-3726-e832-58ee-9847508f2e2f}">
           <p14:sldIdLst>
             <p14:sldId id="256"/>
             <p14:sldId id="257"/>
@@ -139,7 +139,7 @@
             <p14:sldId id="259"/>
           </p14:sldIdLst>
         </p14:section>
-        <p14:section name="Text into dates" id="{26921470-408d-283f-6032-f746f6326f2e}">
+        <p14:section name="Text into dates" id="{60838502-24bb-d8b1-0b45-55ba9f94f9c4}">
           <p14:sldIdLst>
             <p14:sldId id="260"/>
             <p14:sldId id="261"/>
@@ -150,7 +150,7 @@
             <p14:sldId id="266"/>
           </p14:sldIdLst>
         </p14:section>
-        <p14:section name="Values that mean &quot;missing&quot;" id="{abf52758-1516-0181-2e44-bbdca6df133d}">
+        <p14:section name="Values that mean &quot;missing&quot;" id="{64ff4fd8-7221-48c2-ff41-26c622416596}">
           <p14:sldIdLst>
             <p14:sldId id="267"/>
             <p14:sldId id="268"/>
@@ -159,7 +159,7 @@
             <p14:sldId id="271"/>
           </p14:sldIdLst>
         </p14:section>
-        <p14:section name="Repeated names" id="{f1c68f0f-6e81-18e7-1ae2-ca4c67ac1468}">
+        <p14:section name="Repeated names" id="{0b1fb4ee-9406-8790-212c-88adb9df12f4}">
           <p14:sldIdLst>
             <p14:sldId id="272"/>
             <p14:sldId id="273"/>
@@ -170,7 +170,7 @@
             <p14:sldId id="278"/>
           </p14:sldIdLst>
         </p14:section>
-        <p14:section name="Wrap up" id="{138f2f7f-c9f4-61f7-b215-185fb8af9df5}">
+        <p14:section name="Wrap up" id="{26280507-ed3a-24d7-9008-9749dccb891f}">
           <p14:sldIdLst>
             <p14:sldId id="279"/>
             <p14:sldId id="280"/>
@@ -3641,7 +3641,7 @@
               <a:t>​</a:t>
             </a:r>
             <a:r>
-              <a:rPr lang="en-US" sz="1300" dirty="0">
+              <a:rPr lang="en-US" sz="1300" b="1" dirty="0">
                 <a:solidFill>
                   <a:srgbClr val="B86E1E"/>
                 </a:solidFill>
@@ -4017,7 +4017,7 @@
               <a:t>. As text, the "smallest" was </a:t>
             </a:r>
             <a:r>
-              <a:rPr lang="en-US" sz="1300" dirty="0">
+              <a:rPr lang="en-US" sz="1300" b="1" dirty="0">
                 <a:solidFill>
                   <a:srgbClr val="B86E1E"/>
                 </a:solidFill>
@@ -4093,7 +4093,7 @@
               <a:t> If they're real dates, the smallest should be the oldest game and the largest the newest. So we ask for the </a:t>
             </a:r>
             <a:r>
-              <a:rPr lang="en-US" sz="1300" dirty="0">
+              <a:rPr lang="en-US" sz="1300" b="1" dirty="0">
                 <a:solidFill>
                   <a:srgbClr val="B86E1E"/>
                 </a:solidFill>
@@ -4112,7 +4112,7 @@
               <a:t> and </a:t>
             </a:r>
             <a:r>
-              <a:rPr lang="en-US" sz="1300" dirty="0">
+              <a:rPr lang="en-US" sz="1300" b="1" dirty="0">
                 <a:solidFill>
                   <a:srgbClr val="B86E1E"/>
                 </a:solidFill>
@@ -4286,7 +4286,7 @@
               <a:t>7,317 games have a </a:t>
             </a:r>
             <a:r>
-              <a:rPr lang="en-US" sz="1600" dirty="0">
+              <a:rPr lang="en-US" sz="1600" b="1" dirty="0">
                 <a:solidFill>
                   <a:srgbClr val="E8A55A"/>
                 </a:solidFill>
@@ -5762,7 +5762,7 @@
               <a:t>​</a:t>
             </a:r>
             <a:r>
-              <a:rPr lang="en-US" sz="1300" dirty="0">
+              <a:rPr lang="en-US" sz="1300" b="1" dirty="0">
                 <a:solidFill>
                   <a:srgbClr val="B86E1E"/>
                 </a:solidFill>
@@ -5781,7 +5781,7 @@
               <a:t> swaps every 0 for </a:t>
             </a:r>
             <a:r>
-              <a:rPr lang="en-US" sz="1300" dirty="0">
+              <a:rPr lang="en-US" sz="1300" b="1" dirty="0">
                 <a:solidFill>
                   <a:srgbClr val="B86E1E"/>
                 </a:solidFill>
@@ -5800,7 +5800,7 @@
               <a:t>, which Polars stores as a null. Then </a:t>
             </a:r>
             <a:r>
-              <a:rPr lang="en-US" sz="1300" dirty="0">
+              <a:rPr lang="en-US" sz="1300" b="1" dirty="0">
                 <a:solidFill>
                   <a:srgbClr val="B86E1E"/>
                 </a:solidFill>
@@ -5998,7 +5998,7 @@
               <a:t>Every column has 0 nulls, except </a:t>
             </a:r>
             <a:r>
-              <a:rPr lang="en-US" sz="1100" i="1" dirty="0">
+              <a:rPr lang="en-US" sz="1100" b="1" i="1" dirty="0">
                 <a:solidFill>
                   <a:srgbClr val="B86E1E"/>
                 </a:solidFill>
@@ -6253,7 +6253,7 @@
               <a:t>We decided 0 means "missing" for </a:t>
             </a:r>
             <a:r>
-              <a:rPr lang="en-US" sz="1800" dirty="0">
+              <a:rPr lang="en-US" sz="1800" b="1" dirty="0">
                 <a:solidFill>
                   <a:srgbClr val="B86E1E"/>
                 </a:solidFill>
@@ -6272,7 +6272,7 @@
               <a:t> but not for </a:t>
             </a:r>
             <a:r>
-              <a:rPr lang="en-US" sz="1800" dirty="0">
+              <a:rPr lang="en-US" sz="1800" b="1" dirty="0">
                 <a:solidFill>
                   <a:srgbClr val="B86E1E"/>
                 </a:solidFill>
@@ -6743,7 +6743,7 @@
               <a:t> </a:t>
             </a:r>
             <a:r>
-              <a:rPr lang="en-US" sz="1300" dirty="0">
+              <a:rPr lang="en-US" sz="1300" b="1" dirty="0">
                 <a:solidFill>
                   <a:srgbClr val="B86E1E"/>
                 </a:solidFill>
@@ -6762,7 +6762,7 @@
               <a:t> marks every row whose </a:t>
             </a:r>
             <a:r>
-              <a:rPr lang="en-US" sz="1300" dirty="0">
+              <a:rPr lang="en-US" sz="1300" b="1" dirty="0">
                 <a:solidFill>
                   <a:srgbClr val="B86E1E"/>
                 </a:solidFill>
@@ -6781,7 +6781,7 @@
               <a:t> appears more than once. Sorting by </a:t>
             </a:r>
             <a:r>
-              <a:rPr lang="en-US" sz="1300" dirty="0">
+              <a:rPr lang="en-US" sz="1300" b="1" dirty="0">
                 <a:solidFill>
                   <a:srgbClr val="B86E1E"/>
                 </a:solidFill>
@@ -7094,7 +7094,7 @@
               <a:t>the two </a:t>
             </a:r>
             <a:r>
-              <a:rPr lang="en-US" sz="1300" dirty="0">
+              <a:rPr lang="en-US" sz="1300" b="1" dirty="0">
                 <a:solidFill>
                   <a:srgbClr val="B86E1E"/>
                 </a:solidFill>
@@ -7402,7 +7402,7 @@
               <a:t>how to turn text into dates with </a:t>
             </a:r>
             <a:r>
-              <a:rPr lang="en-US" sz="1800" dirty="0">
+              <a:rPr lang="en-US" sz="1800" b="1" dirty="0">
                 <a:solidFill>
                   <a:srgbClr val="B86E1E"/>
                 </a:solidFill>
@@ -7706,7 +7706,7 @@
               <a:t>​</a:t>
             </a:r>
             <a:r>
-              <a:rPr lang="en-US" sz="1300" dirty="0">
+              <a:rPr lang="en-US" sz="1300" b="1" dirty="0">
                 <a:solidFill>
                   <a:srgbClr val="B86E1E"/>
                 </a:solidFill>
@@ -7900,7 +7900,7 @@
               <a:t>​</a:t>
             </a:r>
             <a:r>
-              <a:rPr lang="en-US" sz="1300" dirty="0">
+              <a:rPr lang="en-US" sz="1300" b="1" dirty="0">
                 <a:solidFill>
                   <a:srgbClr val="B86E1E"/>
                 </a:solidFill>
@@ -7919,7 +7919,7 @@
               <a:t> and </a:t>
             </a:r>
             <a:r>
-              <a:rPr lang="en-US" sz="1300" dirty="0">
+              <a:rPr lang="en-US" sz="1300" b="1" dirty="0">
                 <a:solidFill>
                   <a:srgbClr val="B86E1E"/>
                 </a:solidFill>
@@ -8380,7 +8380,7 @@
               <a:t>AppID only works as an identifier if no two rows share one. </a:t>
             </a:r>
             <a:r>
-              <a:rPr lang="en-US" sz="1300" dirty="0">
+              <a:rPr lang="en-US" sz="1300" b="1" dirty="0">
                 <a:solidFill>
                   <a:srgbClr val="B86E1E"/>
                 </a:solidFill>
@@ -8399,7 +8399,7 @@
               <a:t> marks each AppID that appears once, and </a:t>
             </a:r>
             <a:r>
-              <a:rPr lang="en-US" sz="1300" dirty="0">
+              <a:rPr lang="en-US" sz="1300" b="1" dirty="0">
                 <a:solidFill>
                   <a:srgbClr val="B86E1E"/>
                 </a:solidFill>
@@ -8418,7 +8418,7 @@
               <a:t> gives </a:t>
             </a:r>
             <a:r>
-              <a:rPr lang="en-US" sz="1300" dirty="0">
+              <a:rPr lang="en-US" sz="1300" b="1" dirty="0">
                 <a:solidFill>
                   <a:srgbClr val="B86E1E"/>
                 </a:solidFill>
@@ -9123,7 +9123,7 @@
               <a:t>Why did </a:t>
             </a:r>
             <a:r>
-              <a:rPr lang="en-US" sz="1800" dirty="0">
+              <a:rPr lang="en-US" sz="1800" b="1" dirty="0">
                 <a:solidFill>
                   <a:srgbClr val="E8A55A"/>
                 </a:solidFill>
@@ -9169,7 +9169,7 @@
               <a:t>What is the format code for </a:t>
             </a:r>
             <a:r>
-              <a:rPr lang="en-US" sz="1800" dirty="0">
+              <a:rPr lang="en-US" sz="1800" b="1" dirty="0">
                 <a:solidFill>
                   <a:srgbClr val="E8A55A"/>
                 </a:solidFill>
@@ -9788,7 +9788,7 @@
               <a:t> – a pattern such as </a:t>
             </a:r>
             <a:r>
-              <a:rPr lang="en-US" sz="1800" dirty="0">
+              <a:rPr lang="en-US" sz="1800" b="1" dirty="0">
                 <a:solidFill>
                   <a:srgbClr val="B86E1E"/>
                 </a:solidFill>
@@ -10035,7 +10035,7 @@
               <a:t>​</a:t>
             </a:r>
             <a:r>
-              <a:rPr lang="en-US" sz="1400" dirty="0">
+              <a:rPr lang="en-US" sz="1400" b="1" dirty="0">
                 <a:solidFill>
                   <a:srgbClr val="E8A55A"/>
                 </a:solidFill>
@@ -10054,7 +10054,7 @@
               <a:t> is text, so it sorts alphabetically. Most </a:t>
             </a:r>
             <a:r>
-              <a:rPr lang="en-US" sz="1400" dirty="0">
+              <a:rPr lang="en-US" sz="1400" b="1" dirty="0">
                 <a:solidFill>
                   <a:srgbClr val="E8A55A"/>
                 </a:solidFill>
@@ -10228,7 +10228,7 @@
               <a:t>Our story looks at change over time, so </a:t>
             </a:r>
             <a:r>
-              <a:rPr lang="en-US" sz="1600" dirty="0">
+              <a:rPr lang="en-US" sz="1600" b="1" dirty="0">
                 <a:solidFill>
                   <a:srgbClr val="E8A55A"/>
                 </a:solidFill>
@@ -10676,7 +10676,7 @@
               <a:t>Will Polars be able to work out how our dates are written? What will </a:t>
             </a:r>
             <a:r>
-              <a:rPr lang="en-US" sz="1300" dirty="0">
+              <a:rPr lang="en-US" sz="1300" b="1" dirty="0">
                 <a:solidFill>
                   <a:srgbClr val="B86E1E"/>
                 </a:solidFill>
@@ -10772,7 +10772,7 @@
               <a:t>​</a:t>
             </a:r>
             <a:r>
-              <a:rPr lang="en-US" sz="1300" dirty="0">
+              <a:rPr lang="en-US" sz="1300" b="1" dirty="0">
                 <a:solidFill>
                   <a:srgbClr val="B86E1E"/>
                 </a:solidFill>
@@ -10791,7 +10791,7 @@
               <a:t> turns text into dates. We try it on its own first to see whether Polars can work out how our dates are written. </a:t>
             </a:r>
             <a:r>
-              <a:rPr lang="en-US" sz="1300" dirty="0">
+              <a:rPr lang="en-US" sz="1300" b="1" dirty="0">
                 <a:solidFill>
                   <a:srgbClr val="B86E1E"/>
                 </a:solidFill>
@@ -10810,7 +10810,7 @@
               <a:t> keeps every column and changes just one, and a new name, </a:t>
             </a:r>
             <a:r>
-              <a:rPr lang="en-US" sz="1300" dirty="0">
+              <a:rPr lang="en-US" sz="1300" b="1" dirty="0">
                 <a:solidFill>
                   <a:srgbClr val="B86E1E"/>
                 </a:solidFill>
@@ -10829,7 +10829,7 @@
               <a:t>, keeps </a:t>
             </a:r>
             <a:r>
-              <a:rPr lang="en-US" sz="1300" dirty="0">
+              <a:rPr lang="en-US" sz="1300" b="1" dirty="0">
                 <a:solidFill>
                   <a:srgbClr val="B86E1E"/>
                 </a:solidFill>
@@ -11169,7 +11169,7 @@
               <a:t> → the part of our code it was working on: our </a:t>
             </a:r>
             <a:r>
-              <a:rPr lang="en-US" sz="1100" dirty="0">
+              <a:rPr lang="en-US" sz="1100" b="1" dirty="0">
                 <a:solidFill>
                   <a:srgbClr val="B86E1E"/>
                 </a:solidFill>
@@ -11379,7 +11379,7 @@
               <a:t>Polars recognises </a:t>
             </a:r>
             <a:r>
-              <a:rPr lang="en-US" sz="1300" dirty="0">
+              <a:rPr lang="en-US" sz="1300" b="1" dirty="0">
                 <a:solidFill>
                   <a:srgbClr val="B86E1E"/>
                 </a:solidFill>
@@ -11398,7 +11398,7 @@
               <a:t>, but our dates look like </a:t>
             </a:r>
             <a:r>
-              <a:rPr lang="en-US" sz="1300" dirty="0">
+              <a:rPr lang="en-US" sz="1300" b="1" dirty="0">
                 <a:solidFill>
                   <a:srgbClr val="B86E1E"/>
                 </a:solidFill>
@@ -12696,7 +12696,7 @@
               <a:t> → turns the text in </a:t>
             </a:r>
             <a:r>
-              <a:rPr lang="en-US" sz="1200" dirty="0">
+              <a:rPr lang="en-US" sz="1200" b="1" dirty="0">
                 <a:solidFill>
                   <a:srgbClr val="B86E1E"/>
                 </a:solidFill>
@@ -12715,7 +12715,7 @@
               <a:t> into dates using the format </a:t>
             </a:r>
             <a:r>
-              <a:rPr lang="en-US" sz="1200" dirty="0">
+              <a:rPr lang="en-US" sz="1200" b="1" dirty="0">
                 <a:solidFill>
                   <a:srgbClr val="B86E1E"/>
                 </a:solidFill>
